--- a/slides/aula1-alura.pptx
+++ b/slides/aula1-alura.pptx
@@ -5052,7 +5052,7 @@
                 <a:ea typeface="Roboto" pitchFamily="34" charset="-122"/>
                 <a:cs typeface="Roboto" pitchFamily="34" charset="-120"/>
               </a:rPr>
-              <a:t>Numa das formas, às vezes a sugestão sai direto — sem checar nada, só no que parece razoável.</a:t>
+              <a:t>Na forma solta, a resposta veio completa: a receita inteira, passo a passo, e até por que o leite ficou de fora.</a:t>
             </a:r>
             <a:endParaRPr lang="en-US" sz="2800" dirty="0"/>
           </a:p>
@@ -5106,7 +5106,7 @@
         <p:spPr>
           <a:xfrm>
             <a:off x="3337560" y="6400800"/>
-            <a:ext cx="17922240" cy="548640"/>
+            <a:ext cx="17922240" cy="1097280"/>
           </a:xfrm>
           <a:prstGeom prst="rect">
             <a:avLst/>
@@ -5133,7 +5133,7 @@
                 <a:ea typeface="Roboto" pitchFamily="34" charset="-122"/>
                 <a:cs typeface="Roboto" pitchFamily="34" charset="-120"/>
               </a:rPr>
-              <a:t>Na outra, ela sempre confere antes. A resposta demora um pouco mais, mas vem apoiada no que é real.</a:t>
+              <a:t>Na forma rígida, ela fez tudo certo por dentro — mas a resposta final foi seca: só confirmou que registrou o uso.</a:t>
             </a:r>
             <a:endParaRPr lang="en-US" sz="2800" dirty="0"/>
           </a:p>
@@ -5147,7 +5147,7 @@
         </p:nvSpPr>
         <p:spPr>
           <a:xfrm>
-            <a:off x="2423160" y="7470648"/>
+            <a:off x="2423160" y="8019288"/>
             <a:ext cx="777240" cy="548640"/>
           </a:xfrm>
           <a:prstGeom prst="rect">
@@ -5186,7 +5186,7 @@
         </p:nvSpPr>
         <p:spPr>
           <a:xfrm>
-            <a:off x="3337560" y="7452360"/>
+            <a:off x="3337560" y="8001000"/>
             <a:ext cx="17922240" cy="1097280"/>
           </a:xfrm>
           <a:prstGeom prst="rect">
@@ -5214,7 +5214,7 @@
                 <a:ea typeface="Roboto" pitchFamily="34" charset="-122"/>
                 <a:cs typeface="Roboto" pitchFamily="34" charset="-120"/>
               </a:rPr>
-              <a:t>Nenhuma das duas é "a errada" — são dois comportamentos possíveis do mesmo produto, e cabe a mim decidir qual eu quero.</a:t>
+              <a:t>As duas respeitaram a restrição. Só uma me contou o que eu ia comer — e isso eu não esperava antes de comparar.</a:t>
             </a:r>
             <a:endParaRPr lang="en-US" sz="2800" dirty="0"/>
           </a:p>
